--- a/Projeto de Software e Segurança da Informação - 2026/Projeto de Software/Aula 01 - Aula Inaugural/Aula Inaugural - 5 grupos.pptx
+++ b/Projeto de Software e Segurança da Informação - 2026/Projeto de Software/Aula 01 - Aula Inaugural/Aula Inaugural - 5 grupos.pptx
@@ -19290,13 +19290,13 @@
                         <a:rPr lang="pt-BR" b="0" i="1" smtClean="0">
                           <a:latin typeface="Cambria Math" panose="02040503050406030204" pitchFamily="18" charset="0"/>
                         </a:rPr>
-                        <m:t>𝐹𝑖𝑛𝑎𝑙</m:t>
+                        <m:t>𝑀</m:t>
                       </m:r>
                       <m:r>
-                        <a:rPr lang="pt-BR" i="1" smtClean="0">
+                        <a:rPr lang="pt-BR" b="0" i="1" smtClean="0">
                           <a:latin typeface="Cambria Math" panose="02040503050406030204" pitchFamily="18" charset="0"/>
                         </a:rPr>
-                        <m:t>=</m:t>
+                        <m:t>1 =</m:t>
                       </m:r>
                       <m:r>
                         <a:rPr lang="pt-BR" b="0" i="1" smtClean="0">
@@ -19320,7 +19320,7 @@
                         <a:rPr lang="pt-BR" b="0" i="1" smtClean="0">
                           <a:latin typeface="Cambria Math" panose="02040503050406030204" pitchFamily="18" charset="0"/>
                         </a:rPr>
-                        <m:t> ∗ 0,7+</m:t>
+                        <m:t> ∗ 0,6+</m:t>
                       </m:r>
                       <m:r>
                         <a:rPr lang="pt-BR" b="0" i="1" smtClean="0">
@@ -19356,7 +19356,7 @@
                         <a:rPr lang="pt-BR" b="0" i="1" smtClean="0">
                           <a:latin typeface="Cambria Math" panose="02040503050406030204" pitchFamily="18" charset="0"/>
                         </a:rPr>
-                        <m:t> ∗ 0,3</m:t>
+                        <m:t> ∗ 0,4</m:t>
                       </m:r>
                     </m:oMath>
                   </m:oMathPara>
@@ -24091,8 +24091,8 @@
           </a:p>
         </p:txBody>
       </p:sp>
-      <mc:AlternateContent xmlns:mc="http://schemas.openxmlformats.org/markup-compatibility/2006" xmlns:a14="http://schemas.microsoft.com/office/drawing/2010/main">
-        <mc:Choice Requires="a14">
+      <mc:AlternateContent xmlns:mc="http://schemas.openxmlformats.org/markup-compatibility/2006">
+        <mc:Choice xmlns:a14="http://schemas.microsoft.com/office/drawing/2010/main" Requires="a14">
           <p:sp>
             <p:nvSpPr>
               <p:cNvPr id="3" name="Espaço Reservado para Conteúdo 2">
@@ -24191,13 +24191,13 @@
                         <a:rPr lang="pt-BR" b="0" i="1" smtClean="0">
                           <a:latin typeface="Cambria Math" panose="02040503050406030204" pitchFamily="18" charset="0"/>
                         </a:rPr>
-                        <m:t>𝐹𝑖𝑛𝑎𝑙</m:t>
+                        <m:t>𝑀</m:t>
                       </m:r>
                       <m:r>
-                        <a:rPr lang="pt-BR" i="1" smtClean="0">
+                        <a:rPr lang="pt-BR" b="0" i="1" smtClean="0">
                           <a:latin typeface="Cambria Math" panose="02040503050406030204" pitchFamily="18" charset="0"/>
                         </a:rPr>
-                        <m:t>=</m:t>
+                        <m:t>2=</m:t>
                       </m:r>
                       <m:r>
                         <a:rPr lang="pt-BR" b="0" i="1" smtClean="0">
@@ -24263,7 +24263,7 @@
             </p:txBody>
           </p:sp>
         </mc:Choice>
-        <mc:Fallback xmlns="">
+        <mc:Fallback>
           <p:sp>
             <p:nvSpPr>
               <p:cNvPr id="3" name="Espaço Reservado para Conteúdo 2">

--- a/Projeto de Software e Segurança da Informação - 2026/Projeto de Software/Aula 01 - Aula Inaugural/Aula Inaugural - 5 grupos.pptx
+++ b/Projeto de Software e Segurança da Informação - 2026/Projeto de Software/Aula 01 - Aula Inaugural/Aula Inaugural - 5 grupos.pptx
@@ -19172,8 +19172,8 @@
           </a:p>
         </p:txBody>
       </p:sp>
-      <mc:AlternateContent xmlns:mc="http://schemas.openxmlformats.org/markup-compatibility/2006">
-        <mc:Choice xmlns:a14="http://schemas.microsoft.com/office/drawing/2010/main" Requires="a14">
+      <mc:AlternateContent xmlns:mc="http://schemas.openxmlformats.org/markup-compatibility/2006" xmlns:a14="http://schemas.microsoft.com/office/drawing/2010/main">
+        <mc:Choice Requires="a14">
           <p:sp>
             <p:nvSpPr>
               <p:cNvPr id="3" name="Espaço Reservado para Conteúdo 2">
@@ -19374,7 +19374,7 @@
             </p:txBody>
           </p:sp>
         </mc:Choice>
-        <mc:Fallback>
+        <mc:Fallback xmlns="">
           <p:sp>
             <p:nvSpPr>
               <p:cNvPr id="3" name="Espaço Reservado para Conteúdo 2">
@@ -24148,6 +24148,32 @@
                 </a:pPr>
                 <a:r>
                   <a:rPr lang="pt-BR" sz="1800" dirty="0"/>
+                  <a:t>A apresentação deve ser em formato </a:t>
+                </a:r>
+                <a:r>
+                  <a:rPr lang="pt-BR" sz="1800" dirty="0" err="1"/>
+                  <a:t>pitch</a:t>
+                </a:r>
+                <a:r>
+                  <a:rPr lang="pt-BR" sz="1800" dirty="0"/>
+                  <a:t>, clique </a:t>
+                </a:r>
+                <a:r>
+                  <a:rPr lang="pt-BR" sz="1800" dirty="0">
+                    <a:hlinkClick r:id="rId2"/>
+                  </a:rPr>
+                  <a:t>aqui</a:t>
+                </a:r>
+                <a:endParaRPr lang="pt-BR" sz="1800" dirty="0"/>
+              </a:p>
+              <a:p>
+                <a:pPr marL="1028700" lvl="1" indent="-342900">
+                  <a:spcBef>
+                    <a:spcPts val="0"/>
+                  </a:spcBef>
+                </a:pPr>
+                <a:r>
+                  <a:rPr lang="pt-BR" sz="1800" dirty="0"/>
                   <a:t>Prova – 17/06</a:t>
                 </a:r>
                 <a:endParaRPr lang="pt-BR" dirty="0"/>
@@ -24286,9 +24312,9 @@
                 <a:ext cx="11007306" cy="2362200"/>
               </a:xfrm>
               <a:blipFill>
-                <a:blip r:embed="rId2"/>
+                <a:blip r:embed="rId3"/>
                 <a:stretch>
-                  <a:fillRect l="-554"/>
+                  <a:fillRect l="-554" b="-10078"/>
                 </a:stretch>
               </a:blipFill>
             </p:spPr>
